--- a/colon_talk_draft.pptx
+++ b/colon_talk_draft.pptx
@@ -3150,34 +3150,6 @@
           </a:p>
         </p:txBody>
       </p:sp>
-      <p:sp>
-        <p:nvSpPr>
-          <p:cNvPr id="3" name="Subtitle 2"/>
-          <p:cNvSpPr>
-            <a:spLocks noGrp="1"/>
-          </p:cNvSpPr>
-          <p:nvPr>
-            <p:ph idx="1" type="subTitle"/>
-          </p:nvPr>
-        </p:nvSpPr>
-        <p:spPr>
-          <a:xfrm>
-            <a:off x="1371600" y="2914650"/>
-            <a:ext cx="6400800" cy="1314450"/>
-          </a:xfrm>
-        </p:spPr>
-        <p:txBody>
-          <a:bodyPr/>
-          <a:lstStyle/>
-          <a:p>
-            <a:pPr lvl="0" indent="0" marL="0">
-              <a:buNone/>
-            </a:pPr>
-            <a:br/>
-            <a:br/>
-          </a:p>
-        </p:txBody>
-      </p:sp>
     </p:spTree>
   </p:cSld>
 </p:sld>
@@ -3366,7 +3338,9 @@
         <p:nvSpPr>
           <p:cNvPr id="1" name="TextBox 3"/>
           <p:cNvSpPr txBox="1"/>
-          <p:nvPr/>
+          <p:nvPr>
+            <p:ph idx="1"/>
+          </p:nvPr>
         </p:nvSpPr>
         <p:spPr>
           <a:xfrm>
@@ -3542,7 +3516,9 @@
         <p:nvSpPr>
           <p:cNvPr id="1" name="TextBox 3"/>
           <p:cNvSpPr txBox="1"/>
-          <p:nvPr/>
+          <p:nvPr>
+            <p:ph idx="1"/>
+          </p:nvPr>
         </p:nvSpPr>
         <p:spPr>
           <a:xfrm>
@@ -4154,7 +4130,7 @@
             </a:pPr>
             <a:r>
               <a:rPr/>
-              <a:t>Kelly, Ronan J., Jaffer A. Ajani, Jaroslaw Kuzdzal, Thomas Zander, Eric Van Cutsem, Guillaume Piessen, Guillermo Mendez, et al. 2021. “Adjuvant Nivolumab in Resected Esophageal or Gastroesophageal Junction Cancer.” </a:t>
+              <a:t>Kelly, Ronan J., Jaffer A. Ajani, Jaroslaw Kuzdzal, et al. 2021. “Adjuvant Nivolumab in Resected Esophageal or Gastroesophageal Junction Cancer.” </a:t>
             </a:r>
             <a:r>
               <a:rPr i="1"/>
@@ -4162,7 +4138,7 @@
             </a:r>
             <a:r>
               <a:rPr/>
-              <a:t> 384 (13): 1191–1203. </a:t>
+              <a:t> 384 (13): 1191–203. </a:t>
             </a:r>
             <a:r>
               <a:rPr>
@@ -4208,7 +4184,7 @@
             </a:pPr>
             <a:r>
               <a:rPr/>
-              <a:t>Shaheen, Nicholas J., Prateek Sharma, Bergein F. Overholt, Herbert C. Wolfsen, Richard E. Sampliner, Kenneth K. Wang, Joseph A. Galanko, et al. 2009. “Radiofrequency Ablation in Barrett’s Esophagus with Dysplasia.” </a:t>
+              <a:t>Shaheen, Nicholas J., Prateek Sharma, Bergein F. Overholt, et al. 2009. “Radiofrequency Ablation in Barrett’s Esophagus with Dysplasia.” </a:t>
             </a:r>
             <a:r>
               <a:rPr i="1"/>
@@ -4235,7 +4211,7 @@
             </a:pPr>
             <a:r>
               <a:rPr/>
-              <a:t>Shapiro, Joel, J. Jan B. van Lanschot, Maarten C. C. M. Hulshof, Pieter van Hagen, Mark I. van Berge Henegouwen, Bas P. L. Wijnhoven, Hanneke W. M. van Laarhoven, et al. 2015. “Neoadjuvant Chemoradiotherapy Plus Surgery Versus Surgery Alone for Oesophageal or Junctional Cancer (CROSS): Long-Term Results of a Randomised Controlled Trial.” </a:t>
+              <a:t>Shapiro, Joel, J. Jan B. van Lanschot, Maarten C. C. M. Hulshof, et al. 2015. “Neoadjuvant Chemoradiotherapy Plus Surgery Versus Surgery Alone for Oesophageal or Junctional Cancer (CROSS): Long-Term Results of a Randomised Controlled Trial.” </a:t>
             </a:r>
             <a:r>
               <a:rPr i="1"/>
@@ -4821,7 +4797,7 @@
             </a:pPr>
             <a:r>
               <a:rPr/>
-              <a:t>(Schaefer, DeMatteo, and Serrano 2022)</a:t>
+              <a:t>(Schaefer et al. 2022)</a:t>
             </a:r>
           </a:p>
           <a:p>
@@ -5960,7 +5936,9 @@
             <p:nvSpPr>
               <p:cNvPr id="1" name="TextBox 3"/>
               <p:cNvSpPr txBox="1"/>
-              <p:nvPr/>
+              <p:nvPr>
+                <p:ph idx="1"/>
+              </p:nvPr>
             </p:nvSpPr>
             <p:spPr>
               <a:xfrm>
@@ -6075,7 +6053,9 @@
             <p:nvSpPr>
               <p:cNvPr id="1" name="TextBox 3"/>
               <p:cNvSpPr txBox="1"/>
-              <p:nvPr/>
+              <p:nvPr>
+                <p:ph idx="1"/>
+              </p:nvPr>
             </p:nvSpPr>
             <p:spPr>
               <a:xfrm>

--- a/colon_talk_draft.pptx
+++ b/colon_talk_draft.pptx
@@ -18,8 +18,6 @@
     <p:sldId id="266" r:id="rId12"/>
     <p:sldId id="267" r:id="rId13"/>
     <p:sldId id="268" r:id="rId14"/>
-    <p:sldId id="269" r:id="rId15"/>
-    <p:sldId id="270" r:id="rId16"/>
   </p:sldIdLst>
   <p:sldSz cx="9144000" cy="5143500" type="screen16x9"/>
   <p:notesSz cx="6858000" cy="9144000"/>
@@ -3172,222 +3170,6 @@
           <a:chExt cx="0" cy="0"/>
         </a:xfrm>
       </p:grpSpPr>
-      <p:sp>
-        <p:nvSpPr>
-          <p:cNvPr id="3" name="Content Placeholder 2"/>
-          <p:cNvSpPr>
-            <a:spLocks noGrp="1"/>
-          </p:cNvSpPr>
-          <p:nvPr>
-            <p:ph idx="1"/>
-          </p:nvPr>
-        </p:nvSpPr>
-        <p:spPr/>
-        <p:txBody>
-          <a:bodyPr/>
-          <a:lstStyle/>
-          <a:p>
-            <a:pPr lvl="0" indent="0" marL="0">
-              <a:buNone/>
-            </a:pPr>
-            <a:r>
-              <a:rPr/>
-              <a:t>(Shapiro et al. 2015)</a:t>
-            </a:r>
-          </a:p>
-          <a:p>
-            <a:pPr lvl="0" indent="0" marL="0">
-              <a:spcBef>
-                <a:spcPts val="3000"/>
-              </a:spcBef>
-              <a:buNone/>
-            </a:pPr>
-            <a:r>
-              <a:rPr b="1"/>
-              <a:t>Checkmate 577 Trial</a:t>
-            </a:r>
-          </a:p>
-          <a:p>
-            <a:pPr lvl="0" indent="0" marL="0">
-              <a:buNone/>
-            </a:pPr>
-            <a:r>
-              <a:rPr/>
-              <a:t>Immunotherapy with nivolumab as adjuvant therapy after CROSS regimen for patients with residual disease</a:t>
-            </a:r>
-          </a:p>
-          <a:p>
-            <a:pPr lvl="0" indent="0" marL="0">
-              <a:buNone/>
-            </a:pPr>
-            <a:r>
-              <a:rPr/>
-              <a:t>(Kelly et al. 2021)</a:t>
-            </a:r>
-          </a:p>
-          <a:p>
-            <a:pPr lvl="0" indent="0" marL="0">
-              <a:spcBef>
-                <a:spcPts val="3000"/>
-              </a:spcBef>
-              <a:buNone/>
-            </a:pPr>
-            <a:r>
-              <a:rPr b="1"/>
-              <a:t>Nivolumab</a:t>
-            </a:r>
-          </a:p>
-        </p:txBody>
-      </p:sp>
-    </p:spTree>
-  </p:cSld>
-</p:sld>
-</file>
-
-<file path=ppt/slides/slide11.xml><?xml version="1.0" encoding="utf-8"?>
-<p:sld xmlns:a="http://schemas.openxmlformats.org/drawingml/2006/main" xmlns:r="http://schemas.openxmlformats.org/officeDocument/2006/relationships" xmlns:p="http://schemas.openxmlformats.org/presentationml/2006/main">
-  <p:cSld>
-    <p:spTree>
-      <p:nvGrpSpPr>
-        <p:cNvPr id="1" name=""/>
-        <p:cNvGrpSpPr/>
-        <p:nvPr/>
-      </p:nvGrpSpPr>
-      <p:grpSpPr>
-        <a:xfrm>
-          <a:off x="0" y="0"/>
-          <a:ext cx="0" cy="0"/>
-          <a:chOff x="0" y="0"/>
-          <a:chExt cx="0" cy="0"/>
-        </a:xfrm>
-      </p:grpSpPr>
-      <p:sp>
-        <p:nvSpPr>
-          <p:cNvPr id="3" name="Content Placeholder 2"/>
-          <p:cNvSpPr>
-            <a:spLocks noGrp="1"/>
-          </p:cNvSpPr>
-          <p:nvPr>
-            <p:ph idx="1" sz="half"/>
-          </p:nvPr>
-        </p:nvSpPr>
-        <p:spPr/>
-        <p:txBody>
-          <a:bodyPr/>
-          <a:lstStyle/>
-          <a:p>
-            <a:pPr lvl="0" indent="0" marL="0">
-              <a:buNone/>
-            </a:pPr>
-            <a:r>
-              <a:rPr/>
-              <a:t>PD-L1 agonist ligand</a:t>
-            </a:r>
-          </a:p>
-          <a:p>
-            <a:pPr lvl="0" indent="0" marL="0">
-              <a:buNone/>
-            </a:pPr>
-            <a:r>
-              <a:rPr/>
-              <a:t>Interferes with tumor cell down-regulation of T cells</a:t>
-            </a:r>
-          </a:p>
-          <a:p>
-            <a:pPr lvl="0" indent="0" marL="0">
-              <a:buNone/>
-            </a:pPr>
-            <a:r>
-              <a:rPr/>
-              <a:t>Active against stage IV esophageal cancer</a:t>
-            </a:r>
-          </a:p>
-        </p:txBody>
-      </p:sp>
-      <p:pic>
-        <p:nvPicPr>
-          <p:cNvPr descr="images/nivo.png" id="0" name="Picture 1"/>
-          <p:cNvPicPr>
-            <a:picLocks noGrp="1" noChangeAspect="1"/>
-          </p:cNvPicPr>
-          <p:nvPr/>
-        </p:nvPicPr>
-        <p:blipFill>
-          <a:blip r:embed="rId2"/>
-          <a:stretch>
-            <a:fillRect/>
-          </a:stretch>
-        </p:blipFill>
-        <p:spPr bwMode="auto">
-          <a:xfrm>
-            <a:off x="4762500" y="1193800"/>
-            <a:ext cx="3810000" cy="2882900"/>
-          </a:xfrm>
-          <a:prstGeom prst="rect">
-            <a:avLst/>
-          </a:prstGeom>
-          <a:noFill/>
-          <a:ln w="9525">
-            <a:noFill/>
-            <a:headEnd/>
-            <a:tailEnd/>
-          </a:ln>
-        </p:spPr>
-      </p:pic>
-      <p:sp>
-        <p:nvSpPr>
-          <p:cNvPr id="1" name="TextBox 3"/>
-          <p:cNvSpPr txBox="1"/>
-          <p:nvPr>
-            <p:ph idx="1"/>
-          </p:nvPr>
-        </p:nvSpPr>
-        <p:spPr>
-          <a:xfrm>
-            <a:off x="4648200" y="4076700"/>
-            <a:ext cx="4038600" cy="508000"/>
-          </a:xfrm>
-          <a:prstGeom prst="rect">
-            <a:avLst/>
-          </a:prstGeom>
-          <a:noFill/>
-        </p:spPr>
-        <p:txBody>
-          <a:bodyPr/>
-          <a:lstStyle/>
-          <a:p>
-            <a:pPr lvl="0" indent="0" marL="0" algn="ctr">
-              <a:buNone/>
-            </a:pPr>
-            <a:r>
-              <a:rPr/>
-              <a:t>Nivolumab mechanism of action</a:t>
-            </a:r>
-          </a:p>
-        </p:txBody>
-      </p:sp>
-    </p:spTree>
-  </p:cSld>
-</p:sld>
-</file>
-
-<file path=ppt/slides/slide12.xml><?xml version="1.0" encoding="utf-8"?>
-<p:sld xmlns:a="http://schemas.openxmlformats.org/drawingml/2006/main" xmlns:r="http://schemas.openxmlformats.org/officeDocument/2006/relationships" xmlns:p="http://schemas.openxmlformats.org/presentationml/2006/main">
-  <p:cSld>
-    <p:spTree>
-      <p:nvGrpSpPr>
-        <p:cNvPr id="1" name=""/>
-        <p:cNvGrpSpPr/>
-        <p:nvPr/>
-      </p:nvGrpSpPr>
-      <p:grpSpPr>
-        <a:xfrm>
-          <a:off x="0" y="0"/>
-          <a:ext cx="0" cy="0"/>
-          <a:chOff x="0" y="0"/>
-          <a:chExt cx="0" cy="0"/>
-        </a:xfrm>
-      </p:grpSpPr>
       <mc:AlternateContent xmlns:mc="http://schemas.openxmlformats.org/markup-compatibility/2006">
         <mc:Choice xmlns:a14="http://schemas.microsoft.com/office/drawing/2010/main" Requires="a14">
           <p:sp>
@@ -3964,7 +3746,7 @@
 </p:sld>
 </file>
 
-<file path=ppt/slides/slide13.xml><?xml version="1.0" encoding="utf-8"?>
+<file path=ppt/slides/slide11.xml><?xml version="1.0" encoding="utf-8"?>
 <p:sld xmlns:a="http://schemas.openxmlformats.org/drawingml/2006/main" xmlns:r="http://schemas.openxmlformats.org/officeDocument/2006/relationships" xmlns:p="http://schemas.openxmlformats.org/presentationml/2006/main">
   <p:cSld>
     <p:spTree>
@@ -4041,7 +3823,7 @@
 </p:sld>
 </file>
 
-<file path=ppt/slides/slide14.xml><?xml version="1.0" encoding="utf-8"?>
+<file path=ppt/slides/slide12.xml><?xml version="1.0" encoding="utf-8"?>
 <p:sld xmlns:a="http://schemas.openxmlformats.org/drawingml/2006/main" xmlns:r="http://schemas.openxmlformats.org/officeDocument/2006/relationships" xmlns:p="http://schemas.openxmlformats.org/presentationml/2006/main">
   <p:cSld>
     <p:spTree>
@@ -4266,7 +4048,7 @@
 </p:sld>
 </file>
 
-<file path=ppt/slides/slide15.xml><?xml version="1.0" encoding="utf-8"?>
+<file path=ppt/slides/slide13.xml><?xml version="1.0" encoding="utf-8"?>
 <p:sld xmlns:a="http://schemas.openxmlformats.org/drawingml/2006/main" xmlns:r="http://schemas.openxmlformats.org/officeDocument/2006/relationships" xmlns:p="http://schemas.openxmlformats.org/presentationml/2006/main">
   <p:cSld>
     <p:spTree>
@@ -4428,7 +4210,7 @@
               <a:rPr>
                 <a:hlinkClick r:id="rId2" action="ppaction://hlinksldjump"/>
               </a:rPr>
-              <a:t>Pathophysiology</a:t>
+              <a:t>Carcinomatosis from Colon Cancer</a:t>
             </a:r>
           </a:p>
         </p:txBody>
@@ -4809,7 +4591,182 @@
             </a:pPr>
             <a:r>
               <a:rPr b="1"/>
-              <a:t>Pathophysiology</a:t>
+              <a:t>Carcinomatosis from Colon Cancer</a:t>
+            </a:r>
+          </a:p>
+          <a:p>
+            <a:pPr lvl="0" indent="0" marL="0">
+              <a:buNone/>
+            </a:pPr>
+            <a:r>
+              <a:rPr/>
+              <a:t>Efficacy of HIPEC = </a:t>
+            </a:r>
+            <a:r>
+              <a:rPr/>
+              <a:t>$\function$</a:t>
+            </a:r>
+            <a:r>
+              <a:rPr/>
+              <a:t> (Histology, completeness of cytoreduction, prior surgery score (PSS), PIC) T stage of tumor is not important</a:t>
+            </a:r>
+          </a:p>
+          <a:p>
+            <a:pPr lvl="0" indent="0" marL="0">
+              <a:spcBef>
+                <a:spcPts val="3000"/>
+              </a:spcBef>
+              <a:buNone/>
+            </a:pPr>
+            <a:r>
+              <a:rPr b="1"/>
+              <a:t>HPIEC morbidity</a:t>
+            </a:r>
+          </a:p>
+          <a:p>
+            <a:pPr lvl="0" indent="0" marL="0">
+              <a:buNone/>
+            </a:pPr>
+            <a:r>
+              <a:rPr/>
+              <a:t>Function of age &gt;60, ECOG, hyopalbumenia, PCI score, number of bowel resections, diagphragm involvement, distal pancreatectomy</a:t>
+            </a:r>
+          </a:p>
+          <a:p>
+            <a:pPr lvl="0" indent="0" marL="0">
+              <a:spcBef>
+                <a:spcPts val="3000"/>
+              </a:spcBef>
+              <a:buNone/>
+            </a:pPr>
+            <a:r>
+              <a:rPr b="1"/>
+              <a:t>HIPEC Exclusion</a:t>
+            </a:r>
+          </a:p>
+          <a:p>
+            <a:pPr lvl="0" indent="0" marL="0">
+              <a:buNone/>
+            </a:pPr>
+            <a:r>
+              <a:rPr/>
+              <a:t>Laparoscopy prior to HIPEC. Exclusions for HIPEC:</a:t>
+            </a:r>
+          </a:p>
+          <a:p>
+            <a:pPr lvl="0"/>
+            <a:r>
+              <a:rPr/>
+              <a:t>Large-volume carcinomatosis with PCI&gt;20</a:t>
+            </a:r>
+          </a:p>
+          <a:p>
+            <a:pPr lvl="0"/>
+            <a:r>
+              <a:rPr/>
+              <a:t>Extensive involvement of small bowel mesentery or serosa</a:t>
+            </a:r>
+          </a:p>
+          <a:p>
+            <a:pPr lvl="0"/>
+            <a:r>
+              <a:rPr/>
+              <a:t>Extensive porta hepatis involvement</a:t>
+            </a:r>
+          </a:p>
+          <a:p>
+            <a:pPr lvl="0"/>
+            <a:r>
+              <a:rPr/>
+              <a:t>Long-segment ureteral involvement</a:t>
+            </a:r>
+          </a:p>
+          <a:p>
+            <a:pPr lvl="0"/>
+            <a:r>
+              <a:rPr/>
+              <a:t>Multipe intrahepatic parenchymal liver nodules</a:t>
+            </a:r>
+          </a:p>
+          <a:p>
+            <a:pPr lvl="0" indent="0" marL="0">
+              <a:spcBef>
+                <a:spcPts val="3000"/>
+              </a:spcBef>
+              <a:buNone/>
+            </a:pPr>
+            <a:r>
+              <a:rPr b="1"/>
+              <a:t>HIPEC for T4 tumors</a:t>
+            </a:r>
+          </a:p>
+          <a:p>
+            <a:pPr lvl="0" indent="0" marL="0">
+              <a:buNone/>
+            </a:pPr>
+            <a:r>
+              <a:rPr/>
+              <a:t>HIPECT4 trial shows improvement in local control with HIPEC but no change in DFS or OS ::::: columns ::: {.column width=“50%”} Origin with bowel wall stomach- small intestine - colon - esophagus :::</a:t>
+            </a:r>
+          </a:p>
+          <a:p>
+            <a:pPr lvl="0" indent="0" marL="0">
+              <a:buNone/>
+            </a:pPr>
+            <a:r>
+              <a:rPr/>
+              <a:t>Tyrosine kinase gain of function mutations - KIT2 - PDGRFA3 Genetic inactivation - NF14 - succinate dehydrogenase (SDH)</a:t>
+            </a:r>
+          </a:p>
+          <a:p>
+            <a:pPr lvl="0" indent="0" marL="0">
+              <a:buNone/>
+            </a:pPr>
+            <a:r>
+              <a:rPr/>
+              <a:t>:::::</a:t>
+            </a:r>
+          </a:p>
+          <a:p>
+            <a:pPr lvl="0" indent="0" marL="0">
+              <a:buNone/>
+            </a:pPr>
+            <a:r>
+              <a:rPr/>
+              <a:t>(Shaheen et al. 2009)</a:t>
+            </a:r>
+          </a:p>
+          <a:p>
+            <a:pPr lvl="0" indent="0" marL="0">
+              <a:spcBef>
+                <a:spcPts val="3000"/>
+              </a:spcBef>
+              <a:buNone/>
+            </a:pPr>
+            <a:r>
+              <a:rPr b="1"/>
+              <a:t>Exenteration</a:t>
+            </a:r>
+          </a:p>
+          <a:p>
+            <a:pPr lvl="0" indent="0" marL="0">
+              <a:buNone/>
+            </a:pPr>
+            <a:r>
+              <a:rPr/>
+              <a:t>Para-aortic node involvement is contraindication</a:t>
+            </a:r>
+          </a:p>
+          <a:p>
+            <a:pPr lvl="0" indent="0" marL="0">
+              <a:spcBef>
+                <a:spcPts val="3000"/>
+              </a:spcBef>
+              <a:buNone/>
+            </a:pPr>
+            <a:r>
+              <a:rPr b="1"/>
+              <a:t>Rapido Trial</a:t>
             </a:r>
           </a:p>
         </p:txBody>
@@ -4820,137 +4777,6 @@
 </file>
 
 <file path=ppt/slides/slide4.xml><?xml version="1.0" encoding="utf-8"?>
-<p:sld xmlns:a="http://schemas.openxmlformats.org/drawingml/2006/main" xmlns:r="http://schemas.openxmlformats.org/officeDocument/2006/relationships" xmlns:p="http://schemas.openxmlformats.org/presentationml/2006/main">
-  <p:cSld>
-    <p:spTree>
-      <p:nvGrpSpPr>
-        <p:cNvPr id="1" name=""/>
-        <p:cNvGrpSpPr/>
-        <p:nvPr/>
-      </p:nvGrpSpPr>
-      <p:grpSpPr>
-        <a:xfrm>
-          <a:off x="0" y="0"/>
-          <a:ext cx="0" cy="0"/>
-          <a:chOff x="0" y="0"/>
-          <a:chExt cx="0" cy="0"/>
-        </a:xfrm>
-      </p:grpSpPr>
-      <p:sp>
-        <p:nvSpPr>
-          <p:cNvPr id="3" name="Content Placeholder 2"/>
-          <p:cNvSpPr>
-            <a:spLocks noGrp="1"/>
-          </p:cNvSpPr>
-          <p:nvPr>
-            <p:ph idx="1" sz="half"/>
-          </p:nvPr>
-        </p:nvSpPr>
-        <p:spPr/>
-        <p:txBody>
-          <a:bodyPr/>
-          <a:lstStyle/>
-          <a:p>
-            <a:pPr lvl="0" indent="0" marL="0">
-              <a:buNone/>
-            </a:pPr>
-            <a:r>
-              <a:rPr/>
-              <a:t>Origin with bowel wall stomach- small intestine - colon - esophagus</a:t>
-            </a:r>
-          </a:p>
-        </p:txBody>
-      </p:sp>
-      <p:sp>
-        <p:nvSpPr>
-          <p:cNvPr id="4" name="Content Placeholder 3"/>
-          <p:cNvSpPr>
-            <a:spLocks noGrp="1"/>
-          </p:cNvSpPr>
-          <p:nvPr>
-            <p:ph idx="2" sz="half"/>
-          </p:nvPr>
-        </p:nvSpPr>
-        <p:spPr/>
-        <p:txBody>
-          <a:bodyPr/>
-          <a:lstStyle/>
-          <a:p>
-            <a:pPr lvl="0" indent="0" marL="0">
-              <a:buNone/>
-            </a:pPr>
-            <a:r>
-              <a:rPr/>
-              <a:t>Tyrosine kinase gain of function mutations - KIT2 - PDGRFA3 Genetic inactivation - NF14 - succinate dehydrogenase (SDH)</a:t>
-            </a:r>
-          </a:p>
-        </p:txBody>
-      </p:sp>
-    </p:spTree>
-  </p:cSld>
-</p:sld>
-</file>
-
-<file path=ppt/slides/slide5.xml><?xml version="1.0" encoding="utf-8"?>
-<p:sld xmlns:a="http://schemas.openxmlformats.org/drawingml/2006/main" xmlns:r="http://schemas.openxmlformats.org/officeDocument/2006/relationships" xmlns:p="http://schemas.openxmlformats.org/presentationml/2006/main">
-  <p:cSld>
-    <p:spTree>
-      <p:nvGrpSpPr>
-        <p:cNvPr id="1" name=""/>
-        <p:cNvGrpSpPr/>
-        <p:nvPr/>
-      </p:nvGrpSpPr>
-      <p:grpSpPr>
-        <a:xfrm>
-          <a:off x="0" y="0"/>
-          <a:ext cx="0" cy="0"/>
-          <a:chOff x="0" y="0"/>
-          <a:chExt cx="0" cy="0"/>
-        </a:xfrm>
-      </p:grpSpPr>
-      <p:sp>
-        <p:nvSpPr>
-          <p:cNvPr id="3" name="Content Placeholder 2"/>
-          <p:cNvSpPr>
-            <a:spLocks noGrp="1"/>
-          </p:cNvSpPr>
-          <p:nvPr>
-            <p:ph idx="1"/>
-          </p:nvPr>
-        </p:nvSpPr>
-        <p:spPr/>
-        <p:txBody>
-          <a:bodyPr/>
-          <a:lstStyle/>
-          <a:p>
-            <a:pPr lvl="0" indent="0" marL="0">
-              <a:buNone/>
-            </a:pPr>
-            <a:r>
-              <a:rPr/>
-              <a:t>(Shaheen et al. 2009)</a:t>
-            </a:r>
-          </a:p>
-          <a:p>
-            <a:pPr lvl="0" indent="0" marL="0">
-              <a:spcBef>
-                <a:spcPts val="3000"/>
-              </a:spcBef>
-              <a:buNone/>
-            </a:pPr>
-            <a:r>
-              <a:rPr b="1"/>
-              <a:t>Rapido Trial</a:t>
-            </a:r>
-          </a:p>
-        </p:txBody>
-      </p:sp>
-    </p:spTree>
-  </p:cSld>
-</p:sld>
-</file>
-
-<file path=ppt/slides/slide6.xml><?xml version="1.0" encoding="utf-8"?>
 <p:sld xmlns:a="http://schemas.openxmlformats.org/drawingml/2006/main" xmlns:r="http://schemas.openxmlformats.org/officeDocument/2006/relationships" xmlns:p="http://schemas.openxmlformats.org/presentationml/2006/main">
   <p:cSld>
     <p:spTree>
@@ -5073,7 +4899,7 @@
 </p:sld>
 </file>
 
-<file path=ppt/slides/slide7.xml><?xml version="1.0" encoding="utf-8"?>
+<file path=ppt/slides/slide5.xml><?xml version="1.0" encoding="utf-8"?>
 <p:sld xmlns:a="http://schemas.openxmlformats.org/drawingml/2006/main" xmlns:r="http://schemas.openxmlformats.org/officeDocument/2006/relationships" xmlns:p="http://schemas.openxmlformats.org/presentationml/2006/main">
   <p:cSld>
     <p:spTree>
@@ -5192,7 +5018,7 @@
 </p:sld>
 </file>
 
-<file path=ppt/slides/slide8.xml><?xml version="1.0" encoding="utf-8"?>
+<file path=ppt/slides/slide6.xml><?xml version="1.0" encoding="utf-8"?>
 <p:sld xmlns:a="http://schemas.openxmlformats.org/drawingml/2006/main" xmlns:r="http://schemas.openxmlformats.org/officeDocument/2006/relationships" xmlns:p="http://schemas.openxmlformats.org/presentationml/2006/main">
   <p:cSld>
     <p:spTree>
@@ -6178,7 +6004,7 @@
 </p:sld>
 </file>
 
-<file path=ppt/slides/slide9.xml><?xml version="1.0" encoding="utf-8"?>
+<file path=ppt/slides/slide7.xml><?xml version="1.0" encoding="utf-8"?>
 <p:sld xmlns:a="http://schemas.openxmlformats.org/drawingml/2006/main" xmlns:r="http://schemas.openxmlformats.org/officeDocument/2006/relationships" xmlns:p="http://schemas.openxmlformats.org/presentationml/2006/main">
   <p:cSld>
     <p:spTree>
@@ -6276,6 +6102,222 @@
           </a:ln>
         </p:spPr>
       </p:pic>
+    </p:spTree>
+  </p:cSld>
+</p:sld>
+</file>
+
+<file path=ppt/slides/slide8.xml><?xml version="1.0" encoding="utf-8"?>
+<p:sld xmlns:a="http://schemas.openxmlformats.org/drawingml/2006/main" xmlns:r="http://schemas.openxmlformats.org/officeDocument/2006/relationships" xmlns:p="http://schemas.openxmlformats.org/presentationml/2006/main">
+  <p:cSld>
+    <p:spTree>
+      <p:nvGrpSpPr>
+        <p:cNvPr id="1" name=""/>
+        <p:cNvGrpSpPr/>
+        <p:nvPr/>
+      </p:nvGrpSpPr>
+      <p:grpSpPr>
+        <a:xfrm>
+          <a:off x="0" y="0"/>
+          <a:ext cx="0" cy="0"/>
+          <a:chOff x="0" y="0"/>
+          <a:chExt cx="0" cy="0"/>
+        </a:xfrm>
+      </p:grpSpPr>
+      <p:sp>
+        <p:nvSpPr>
+          <p:cNvPr id="3" name="Content Placeholder 2"/>
+          <p:cNvSpPr>
+            <a:spLocks noGrp="1"/>
+          </p:cNvSpPr>
+          <p:nvPr>
+            <p:ph idx="1"/>
+          </p:nvPr>
+        </p:nvSpPr>
+        <p:spPr/>
+        <p:txBody>
+          <a:bodyPr/>
+          <a:lstStyle/>
+          <a:p>
+            <a:pPr lvl="0" indent="0" marL="0">
+              <a:buNone/>
+            </a:pPr>
+            <a:r>
+              <a:rPr/>
+              <a:t>(Shapiro et al. 2015)</a:t>
+            </a:r>
+          </a:p>
+          <a:p>
+            <a:pPr lvl="0" indent="0" marL="0">
+              <a:spcBef>
+                <a:spcPts val="3000"/>
+              </a:spcBef>
+              <a:buNone/>
+            </a:pPr>
+            <a:r>
+              <a:rPr b="1"/>
+              <a:t>Checkmate 577 Trial</a:t>
+            </a:r>
+          </a:p>
+          <a:p>
+            <a:pPr lvl="0" indent="0" marL="0">
+              <a:buNone/>
+            </a:pPr>
+            <a:r>
+              <a:rPr/>
+              <a:t>Immunotherapy with nivolumab as adjuvant therapy after CROSS regimen for patients with residual disease</a:t>
+            </a:r>
+          </a:p>
+          <a:p>
+            <a:pPr lvl="0" indent="0" marL="0">
+              <a:buNone/>
+            </a:pPr>
+            <a:r>
+              <a:rPr/>
+              <a:t>(Kelly et al. 2021)</a:t>
+            </a:r>
+          </a:p>
+          <a:p>
+            <a:pPr lvl="0" indent="0" marL="0">
+              <a:spcBef>
+                <a:spcPts val="3000"/>
+              </a:spcBef>
+              <a:buNone/>
+            </a:pPr>
+            <a:r>
+              <a:rPr b="1"/>
+              <a:t>Nivolumab</a:t>
+            </a:r>
+          </a:p>
+        </p:txBody>
+      </p:sp>
+    </p:spTree>
+  </p:cSld>
+</p:sld>
+</file>
+
+<file path=ppt/slides/slide9.xml><?xml version="1.0" encoding="utf-8"?>
+<p:sld xmlns:a="http://schemas.openxmlformats.org/drawingml/2006/main" xmlns:r="http://schemas.openxmlformats.org/officeDocument/2006/relationships" xmlns:p="http://schemas.openxmlformats.org/presentationml/2006/main">
+  <p:cSld>
+    <p:spTree>
+      <p:nvGrpSpPr>
+        <p:cNvPr id="1" name=""/>
+        <p:cNvGrpSpPr/>
+        <p:nvPr/>
+      </p:nvGrpSpPr>
+      <p:grpSpPr>
+        <a:xfrm>
+          <a:off x="0" y="0"/>
+          <a:ext cx="0" cy="0"/>
+          <a:chOff x="0" y="0"/>
+          <a:chExt cx="0" cy="0"/>
+        </a:xfrm>
+      </p:grpSpPr>
+      <p:sp>
+        <p:nvSpPr>
+          <p:cNvPr id="3" name="Content Placeholder 2"/>
+          <p:cNvSpPr>
+            <a:spLocks noGrp="1"/>
+          </p:cNvSpPr>
+          <p:nvPr>
+            <p:ph idx="1" sz="half"/>
+          </p:nvPr>
+        </p:nvSpPr>
+        <p:spPr/>
+        <p:txBody>
+          <a:bodyPr/>
+          <a:lstStyle/>
+          <a:p>
+            <a:pPr lvl="0" indent="0" marL="0">
+              <a:buNone/>
+            </a:pPr>
+            <a:r>
+              <a:rPr/>
+              <a:t>PD-L1 agonist ligand</a:t>
+            </a:r>
+          </a:p>
+          <a:p>
+            <a:pPr lvl="0" indent="0" marL="0">
+              <a:buNone/>
+            </a:pPr>
+            <a:r>
+              <a:rPr/>
+              <a:t>Interferes with tumor cell down-regulation of T cells</a:t>
+            </a:r>
+          </a:p>
+          <a:p>
+            <a:pPr lvl="0" indent="0" marL="0">
+              <a:buNone/>
+            </a:pPr>
+            <a:r>
+              <a:rPr/>
+              <a:t>Active against stage IV esophageal cancer</a:t>
+            </a:r>
+          </a:p>
+        </p:txBody>
+      </p:sp>
+      <p:pic>
+        <p:nvPicPr>
+          <p:cNvPr descr="images/nivo.png" id="0" name="Picture 1"/>
+          <p:cNvPicPr>
+            <a:picLocks noGrp="1" noChangeAspect="1"/>
+          </p:cNvPicPr>
+          <p:nvPr/>
+        </p:nvPicPr>
+        <p:blipFill>
+          <a:blip r:embed="rId2"/>
+          <a:stretch>
+            <a:fillRect/>
+          </a:stretch>
+        </p:blipFill>
+        <p:spPr bwMode="auto">
+          <a:xfrm>
+            <a:off x="4762500" y="1193800"/>
+            <a:ext cx="3810000" cy="2882900"/>
+          </a:xfrm>
+          <a:prstGeom prst="rect">
+            <a:avLst/>
+          </a:prstGeom>
+          <a:noFill/>
+          <a:ln w="9525">
+            <a:noFill/>
+            <a:headEnd/>
+            <a:tailEnd/>
+          </a:ln>
+        </p:spPr>
+      </p:pic>
+      <p:sp>
+        <p:nvSpPr>
+          <p:cNvPr id="1" name="TextBox 3"/>
+          <p:cNvSpPr txBox="1"/>
+          <p:nvPr>
+            <p:ph idx="1"/>
+          </p:nvPr>
+        </p:nvSpPr>
+        <p:spPr>
+          <a:xfrm>
+            <a:off x="4648200" y="4076700"/>
+            <a:ext cx="4038600" cy="508000"/>
+          </a:xfrm>
+          <a:prstGeom prst="rect">
+            <a:avLst/>
+          </a:prstGeom>
+          <a:noFill/>
+        </p:spPr>
+        <p:txBody>
+          <a:bodyPr/>
+          <a:lstStyle/>
+          <a:p>
+            <a:pPr lvl="0" indent="0" marL="0" algn="ctr">
+              <a:buNone/>
+            </a:pPr>
+            <a:r>
+              <a:rPr/>
+              <a:t>Nivolumab mechanism of action</a:t>
+            </a:r>
+          </a:p>
+        </p:txBody>
+      </p:sp>
     </p:spTree>
   </p:cSld>
 </p:sld>
